--- a/presentations/05_weekly_summary_s4_to_video_mamba_en.pptx
+++ b/presentations/05_weekly_summary_s4_to_video_mamba_en.pptx
@@ -319,7 +319,7 @@
           <a:p>
             <a:fld id="{5BCAD085-E8A6-8845-BD4E-CB4CCA059FC4}" type="datetimeFigureOut">
               <a:rPr lang="en-US" smtClean="0"/>
-              <a:t>7/26/2026</a:t>
+              <a:t>7/27/2026</a:t>
             </a:fld>
             <a:endParaRPr lang="en-US"/>
           </a:p>
@@ -487,7 +487,7 @@
           <a:p>
             <a:fld id="{5BCAD085-E8A6-8845-BD4E-CB4CCA059FC4}" type="datetimeFigureOut">
               <a:rPr lang="en-US" smtClean="0"/>
-              <a:t>7/26/2026</a:t>
+              <a:t>7/27/2026</a:t>
             </a:fld>
             <a:endParaRPr lang="en-US"/>
           </a:p>
@@ -665,7 +665,7 @@
           <a:p>
             <a:fld id="{5BCAD085-E8A6-8845-BD4E-CB4CCA059FC4}" type="datetimeFigureOut">
               <a:rPr lang="en-US" smtClean="0"/>
-              <a:t>7/26/2026</a:t>
+              <a:t>7/27/2026</a:t>
             </a:fld>
             <a:endParaRPr lang="en-US"/>
           </a:p>
@@ -833,7 +833,7 @@
           <a:p>
             <a:fld id="{5BCAD085-E8A6-8845-BD4E-CB4CCA059FC4}" type="datetimeFigureOut">
               <a:rPr lang="en-US" smtClean="0"/>
-              <a:t>7/26/2026</a:t>
+              <a:t>7/27/2026</a:t>
             </a:fld>
             <a:endParaRPr lang="en-US"/>
           </a:p>
@@ -1078,7 +1078,7 @@
           <a:p>
             <a:fld id="{5BCAD085-E8A6-8845-BD4E-CB4CCA059FC4}" type="datetimeFigureOut">
               <a:rPr lang="en-US" smtClean="0"/>
-              <a:t>7/26/2026</a:t>
+              <a:t>7/27/2026</a:t>
             </a:fld>
             <a:endParaRPr lang="en-US"/>
           </a:p>
@@ -1363,7 +1363,7 @@
           <a:p>
             <a:fld id="{5BCAD085-E8A6-8845-BD4E-CB4CCA059FC4}" type="datetimeFigureOut">
               <a:rPr lang="en-US" smtClean="0"/>
-              <a:t>7/26/2026</a:t>
+              <a:t>7/27/2026</a:t>
             </a:fld>
             <a:endParaRPr lang="en-US"/>
           </a:p>
@@ -1782,7 +1782,7 @@
           <a:p>
             <a:fld id="{5BCAD085-E8A6-8845-BD4E-CB4CCA059FC4}" type="datetimeFigureOut">
               <a:rPr lang="en-US" smtClean="0"/>
-              <a:t>7/26/2026</a:t>
+              <a:t>7/27/2026</a:t>
             </a:fld>
             <a:endParaRPr lang="en-US"/>
           </a:p>
@@ -1899,7 +1899,7 @@
           <a:p>
             <a:fld id="{5BCAD085-E8A6-8845-BD4E-CB4CCA059FC4}" type="datetimeFigureOut">
               <a:rPr lang="en-US" smtClean="0"/>
-              <a:t>7/26/2026</a:t>
+              <a:t>7/27/2026</a:t>
             </a:fld>
             <a:endParaRPr lang="en-US"/>
           </a:p>
@@ -1994,7 +1994,7 @@
           <a:p>
             <a:fld id="{5BCAD085-E8A6-8845-BD4E-CB4CCA059FC4}" type="datetimeFigureOut">
               <a:rPr lang="en-US" smtClean="0"/>
-              <a:t>7/26/2026</a:t>
+              <a:t>7/27/2026</a:t>
             </a:fld>
             <a:endParaRPr lang="en-US"/>
           </a:p>
@@ -2269,7 +2269,7 @@
           <a:p>
             <a:fld id="{5BCAD085-E8A6-8845-BD4E-CB4CCA059FC4}" type="datetimeFigureOut">
               <a:rPr lang="en-US" smtClean="0"/>
-              <a:t>7/26/2026</a:t>
+              <a:t>7/27/2026</a:t>
             </a:fld>
             <a:endParaRPr lang="en-US"/>
           </a:p>
@@ -2521,7 +2521,7 @@
           <a:p>
             <a:fld id="{5BCAD085-E8A6-8845-BD4E-CB4CCA059FC4}" type="datetimeFigureOut">
               <a:rPr lang="en-US" smtClean="0"/>
-              <a:t>7/26/2026</a:t>
+              <a:t>7/27/2026</a:t>
             </a:fld>
             <a:endParaRPr lang="en-US"/>
           </a:p>
@@ -2732,7 +2732,7 @@
           <a:p>
             <a:fld id="{5BCAD085-E8A6-8845-BD4E-CB4CCA059FC4}" type="datetimeFigureOut">
               <a:rPr lang="en-US" smtClean="0"/>
-              <a:t>7/26/2026</a:t>
+              <a:t>7/27/2026</a:t>
             </a:fld>
             <a:endParaRPr lang="en-US"/>
           </a:p>
@@ -3206,7 +3206,7 @@
         <p:spPr>
           <a:xfrm>
             <a:off x="658368" y="2514600"/>
-            <a:ext cx="9875520" cy="457200"/>
+            <a:ext cx="8369022" cy="400110"/>
           </a:xfrm>
           <a:prstGeom prst="rect">
             <a:avLst/>
@@ -3228,7 +3228,36 @@
               </a:defRPr>
             </a:pPr>
             <a:r>
-              <a:t>From S4 state space models to Video Mamba</a:t>
+              <a:rPr dirty="0"/>
+              <a:t>From </a:t>
+            </a:r>
+            <a:r>
+              <a:rPr lang="en-US" b="1" noProof="0" dirty="0"/>
+              <a:t>attention-based</a:t>
+            </a:r>
+            <a:r>
+              <a:rPr lang="en-US" noProof="0" dirty="0"/>
+              <a:t> models to </a:t>
+            </a:r>
+            <a:r>
+              <a:rPr b="1" dirty="0"/>
+              <a:t>S4</a:t>
+            </a:r>
+            <a:r>
+              <a:rPr dirty="0"/>
+              <a:t> </a:t>
+            </a:r>
+            <a:r>
+              <a:rPr b="1" dirty="0"/>
+              <a:t>state space models </a:t>
+            </a:r>
+            <a:r>
+              <a:rPr dirty="0"/>
+              <a:t>to </a:t>
+            </a:r>
+            <a:r>
+              <a:rPr b="1" dirty="0"/>
+              <a:t>Video Mamba</a:t>
             </a:r>
           </a:p>
         </p:txBody>
@@ -3288,7 +3317,7 @@
         <p:spPr>
           <a:xfrm>
             <a:off x="713232" y="3703320"/>
-            <a:ext cx="10149840" cy="1371600"/>
+            <a:ext cx="10149840" cy="1267014"/>
           </a:xfrm>
           <a:prstGeom prst="rect">
             <a:avLst/>
@@ -3313,7 +3342,16 @@
               </a:defRPr>
             </a:pPr>
             <a:r>
-              <a:t>Started the State Space Model block with S4 as the foundation.</a:t>
+              <a:rPr dirty="0"/>
+              <a:t>Started the State Space Model block with </a:t>
+            </a:r>
+            <a:r>
+              <a:rPr b="1" dirty="0"/>
+              <a:t>S4</a:t>
+            </a:r>
+            <a:r>
+              <a:rPr dirty="0"/>
+              <a:t> as the foundation.</a:t>
             </a:r>
           </a:p>
           <a:p>
@@ -3329,7 +3367,16 @@
               </a:defRPr>
             </a:pPr>
             <a:r>
-              <a:t>Moved from fixed state-space dynamics to selective SSMs in Mamba.</a:t>
+              <a:rPr dirty="0"/>
+              <a:t>Moved from fixed state-space dynamics to selective SSMs in </a:t>
+            </a:r>
+            <a:r>
+              <a:rPr b="1" dirty="0"/>
+              <a:t>Mamba</a:t>
+            </a:r>
+            <a:r>
+              <a:rPr dirty="0"/>
+              <a:t>.</a:t>
             </a:r>
           </a:p>
           <a:p>
@@ -3345,7 +3392,24 @@
               </a:defRPr>
             </a:pPr>
             <a:r>
-              <a:t>Connected Mamba to vision and video through Vision Mamba and Video Mamba.</a:t>
+              <a:rPr dirty="0"/>
+              <a:t>Connected Mamba to vision and video through </a:t>
+            </a:r>
+            <a:r>
+              <a:rPr b="1" dirty="0"/>
+              <a:t>Vision Mamba </a:t>
+            </a:r>
+            <a:r>
+              <a:rPr dirty="0"/>
+              <a:t>and </a:t>
+            </a:r>
+            <a:r>
+              <a:rPr b="1" dirty="0"/>
+              <a:t>Video Mamba</a:t>
+            </a:r>
+            <a:r>
+              <a:rPr dirty="0"/>
+              <a:t>.</a:t>
             </a:r>
           </a:p>
         </p:txBody>
@@ -3392,7 +3456,7 @@
         <p:spPr>
           <a:xfrm>
             <a:off x="594360" y="384048"/>
-            <a:ext cx="10972800" cy="566928"/>
+            <a:ext cx="3740126" cy="553998"/>
           </a:xfrm>
           <a:prstGeom prst="rect">
             <a:avLst/>
@@ -3414,8 +3478,14 @@
               </a:defRPr>
             </a:pPr>
             <a:r>
+              <a:rPr dirty="0"/>
               <a:t>Vision Mamba</a:t>
             </a:r>
+            <a:r>
+              <a:rPr lang="es-MX" dirty="0"/>
+              <a:t> (2024)</a:t>
+            </a:r>
+            <a:endParaRPr dirty="0"/>
           </a:p>
         </p:txBody>
       </p:sp>
@@ -3454,7 +3524,11 @@
             </a:pPr>
             <a:r>
               <a:rPr dirty="0"/>
-              <a:t>Vision Mamba adapts Mamba from 1-D sequences to image tokens.</a:t>
+              <a:t>Vision Mamba adapts </a:t>
+            </a:r>
+            <a:r>
+              <a:rPr b="1" dirty="0"/>
+              <a:t>Mamba from 1-D sequences to image tokens.</a:t>
             </a:r>
           </a:p>
           <a:p>
@@ -3487,8 +3561,12 @@
               </a:defRPr>
             </a:pPr>
             <a:r>
+              <a:rPr b="1" dirty="0"/>
+              <a:t>Bidirectional scanning </a:t>
+            </a:r>
+            <a:r>
               <a:rPr dirty="0"/>
-              <a:t>Bidirectional scanning helps visual tokens exchange information across the image.</a:t>
+              <a:t>helps visual tokens exchange information across the image.</a:t>
             </a:r>
           </a:p>
           <a:p>
@@ -3602,7 +3680,7 @@
               <a:t>Visual Mamba </a:t>
             </a:r>
             <a:r>
-              <a:rPr lang="es-MX" dirty="0" err="1"/>
+              <a:rPr lang="en-US" noProof="0" dirty="0"/>
               <a:t>Results</a:t>
             </a:r>
             <a:endParaRPr dirty="0"/>
@@ -3703,7 +3781,7 @@
         <p:spPr>
           <a:xfrm>
             <a:off x="594360" y="384048"/>
-            <a:ext cx="1645002" cy="553998"/>
+            <a:ext cx="7136826" cy="553998"/>
           </a:xfrm>
           <a:prstGeom prst="rect">
             <a:avLst/>
@@ -3725,8 +3803,16 @@
               </a:defRPr>
             </a:pPr>
             <a:r>
-              <a:rPr lang="es-MX" dirty="0" err="1"/>
-              <a:t>VMamba</a:t>
+              <a:rPr lang="es-MX" altLang="ja-JP" sz="3000" b="1" dirty="0"/>
+              <a:t>VMamba: Visual </a:t>
+            </a:r>
+            <a:r>
+              <a:rPr lang="en-US" sz="3000" b="1" noProof="0" dirty="0"/>
+              <a:t>State Space Model</a:t>
+            </a:r>
+            <a:r>
+              <a:rPr lang="es-MX" dirty="0"/>
+              <a:t> (2024)</a:t>
             </a:r>
             <a:endParaRPr dirty="0"/>
           </a:p>
@@ -3772,12 +3858,8 @@
               </a:defRPr>
             </a:pPr>
             <a:r>
-              <a:rPr lang="en-US" dirty="0" err="1"/>
-              <a:t>VMamba</a:t>
-            </a:r>
-            <a:r>
-              <a:rPr lang="en-US" dirty="0"/>
-              <a:t> extends Mamba from 1D sequential modeling to 2D image understanding by introducing 2D Selective Scan (SS2D) </a:t>
+              <a:rPr lang="en-US" noProof="0" dirty="0"/>
+              <a:t>VMamba extends Mamba from 1D sequential modeling to 2D image understanding by introducing 2D Selective Scan (SS2D) </a:t>
             </a:r>
           </a:p>
           <a:p>
@@ -3793,16 +3875,16 @@
               </a:defRPr>
             </a:pPr>
             <a:r>
-              <a:rPr lang="en-US" dirty="0"/>
+              <a:rPr lang="en-US" noProof="0" dirty="0"/>
               <a:t>Instead of processing image patches as a single serialized sequence (as in Vision Mamba), </a:t>
             </a:r>
             <a:r>
-              <a:rPr lang="en-US" dirty="0" err="1"/>
-              <a:t>VMamba</a:t>
-            </a:r>
-            <a:r>
-              <a:rPr lang="en-US" dirty="0"/>
-              <a:t> performs four directional scans. </a:t>
+              <a:rPr lang="en-US" b="1" noProof="0" dirty="0"/>
+              <a:t>VMamba performs four directional scans</a:t>
+            </a:r>
+            <a:r>
+              <a:rPr lang="en-US" noProof="0" dirty="0"/>
+              <a:t>. </a:t>
             </a:r>
           </a:p>
           <a:p>
@@ -3818,7 +3900,7 @@
               </a:defRPr>
             </a:pPr>
             <a:r>
-              <a:rPr lang="en-US" dirty="0"/>
+              <a:rPr lang="en-US" noProof="0" dirty="0"/>
               <a:t>Each scan is processed independently by a Mamba (S6) block, and the outputs are merged to reconstruct the final 2D feature map.</a:t>
             </a:r>
           </a:p>
@@ -3871,7 +3953,7 @@
         <p:spPr>
           <a:xfrm>
             <a:off x="594360" y="384048"/>
-            <a:ext cx="10972800" cy="566928"/>
+            <a:ext cx="3589444" cy="553998"/>
           </a:xfrm>
           <a:prstGeom prst="rect">
             <a:avLst/>
@@ -3893,8 +3975,14 @@
               </a:defRPr>
             </a:pPr>
             <a:r>
+              <a:rPr dirty="0"/>
               <a:t>Video Mamba</a:t>
             </a:r>
+            <a:r>
+              <a:rPr lang="es-MX" dirty="0"/>
+              <a:t> (2024)</a:t>
+            </a:r>
+            <a:endParaRPr dirty="0"/>
           </a:p>
         </p:txBody>
       </p:sp>
@@ -3933,7 +4021,15 @@
             </a:pPr>
             <a:r>
               <a:rPr dirty="0"/>
-              <a:t>Video Mamba extends Mamba-style sequence modeling to video understanding.</a:t>
+              <a:t>Video Mamba </a:t>
+            </a:r>
+            <a:r>
+              <a:rPr b="1" dirty="0"/>
+              <a:t>extends Mamba-style sequence modeling to video understanding</a:t>
+            </a:r>
+            <a:r>
+              <a:rPr dirty="0"/>
+              <a:t>.</a:t>
             </a:r>
           </a:p>
           <a:p>
@@ -3950,7 +4046,15 @@
             </a:pPr>
             <a:r>
               <a:rPr dirty="0"/>
-              <a:t>Video tokens require both spatial and temporal ordering.</a:t>
+              <a:t>Video tokens require both </a:t>
+            </a:r>
+            <a:r>
+              <a:rPr b="1" dirty="0"/>
+              <a:t>spatial and temporal ordering</a:t>
+            </a:r>
+            <a:r>
+              <a:rPr dirty="0"/>
+              <a:t>.</a:t>
             </a:r>
           </a:p>
           <a:p>
@@ -4264,7 +4368,7 @@
               <a:t>Video Mamba: </a:t>
             </a:r>
             <a:r>
-              <a:rPr lang="es-MX" dirty="0" err="1"/>
+              <a:rPr lang="en-US" noProof="0" dirty="0"/>
               <a:t>Results</a:t>
             </a:r>
             <a:endParaRPr dirty="0"/>
@@ -5204,45 +5308,42 @@
               </a:defRPr>
             </a:pPr>
             <a:r>
-              <a:rPr lang="es-MX" dirty="0" err="1"/>
-              <a:t>Advance</a:t>
-            </a:r>
-            <a:r>
-              <a:rPr lang="es-MX" dirty="0"/>
-              <a:t> to </a:t>
-            </a:r>
-            <a:r>
-              <a:rPr lang="es-MX" dirty="0" err="1"/>
-              <a:t>Anomaly</a:t>
-            </a:r>
-            <a:r>
-              <a:rPr lang="es-MX" dirty="0"/>
-              <a:t> </a:t>
-            </a:r>
-            <a:r>
-              <a:rPr lang="es-MX" dirty="0" err="1"/>
-              <a:t>Detection</a:t>
-            </a:r>
-            <a:r>
-              <a:rPr lang="es-MX" dirty="0"/>
-              <a:t> </a:t>
-            </a:r>
-            <a:r>
-              <a:rPr lang="es-MX" dirty="0" err="1"/>
-              <a:t>with</a:t>
-            </a:r>
-            <a:r>
-              <a:rPr lang="es-MX" dirty="0"/>
-              <a:t> Mamba </a:t>
-            </a:r>
-            <a:r>
-              <a:rPr lang="es-MX" dirty="0" err="1"/>
-              <a:t>backbone</a:t>
-            </a:r>
-            <a:endParaRPr dirty="0"/>
-          </a:p>
-        </p:txBody>
-      </p:sp>
+              <a:rPr lang="en-US" noProof="0" dirty="0"/>
+              <a:t>Advance to Anomaly Detection with Mamba backbone</a:t>
+            </a:r>
+          </a:p>
+        </p:txBody>
+      </p:sp>
+      <p:pic>
+        <p:nvPicPr>
+          <p:cNvPr id="5" name="Imagen 4">
+            <a:extLst>
+              <a:ext uri="{FF2B5EF4-FFF2-40B4-BE49-F238E27FC236}">
+                <a16:creationId xmlns:a16="http://schemas.microsoft.com/office/drawing/2014/main" id="{65BEA950-4799-00BB-201B-D7E6A39D7C74}"/>
+              </a:ext>
+            </a:extLst>
+          </p:cNvPr>
+          <p:cNvPicPr>
+            <a:picLocks noChangeAspect="1"/>
+          </p:cNvPicPr>
+          <p:nvPr/>
+        </p:nvPicPr>
+        <p:blipFill>
+          <a:blip r:embed="rId2"/>
+          <a:stretch>
+            <a:fillRect/>
+          </a:stretch>
+        </p:blipFill>
+        <p:spPr>
+          <a:xfrm>
+            <a:off x="1430450" y="2637052"/>
+            <a:ext cx="8896068" cy="3161413"/>
+          </a:xfrm>
+          <a:prstGeom prst="rect">
+            <a:avLst/>
+          </a:prstGeom>
+        </p:spPr>
+      </p:pic>
     </p:spTree>
   </p:cSld>
   <p:clrMapOvr>
@@ -5321,7 +5422,7 @@
         <p:spPr>
           <a:xfrm>
             <a:off x="777240" y="1207008"/>
-            <a:ext cx="10424160" cy="4206240"/>
+            <a:ext cx="10424160" cy="2246769"/>
           </a:xfrm>
           <a:prstGeom prst="rect">
             <a:avLst/>
@@ -5334,7 +5435,7 @@
           </a:bodyPr>
           <a:lstStyle/>
           <a:p>
-            <a:pPr>
+            <a:pPr algn="just">
               <a:spcAft>
                 <a:spcPts val="800"/>
               </a:spcAft>
@@ -5346,11 +5447,36 @@
               </a:defRPr>
             </a:pPr>
             <a:r>
-              <a:t>Continued from Transformer-based video models into State Space Models.</a:t>
-            </a:r>
-          </a:p>
-          <a:p>
-            <a:pPr>
+              <a:rPr dirty="0"/>
+              <a:t>Continued from </a:t>
+            </a:r>
+            <a:r>
+              <a:rPr b="1" dirty="0"/>
+              <a:t>Transformer-based</a:t>
+            </a:r>
+            <a:r>
+              <a:rPr dirty="0"/>
+              <a:t> video </a:t>
+            </a:r>
+            <a:r>
+              <a:rPr b="1" dirty="0"/>
+              <a:t>models</a:t>
+            </a:r>
+            <a:r>
+              <a:rPr dirty="0"/>
+              <a:t> </a:t>
+            </a:r>
+            <a:r>
+              <a:rPr b="1" dirty="0"/>
+              <a:t>into State Space Models</a:t>
+            </a:r>
+            <a:r>
+              <a:rPr dirty="0"/>
+              <a:t>.</a:t>
+            </a:r>
+          </a:p>
+          <a:p>
+            <a:pPr algn="just">
               <a:spcAft>
                 <a:spcPts val="800"/>
               </a:spcAft>
@@ -5362,11 +5488,20 @@
               </a:defRPr>
             </a:pPr>
             <a:r>
-              <a:t>Reviewed the SSM view: inputs, hidden states, dynamics, and outputs.</a:t>
-            </a:r>
-          </a:p>
-          <a:p>
-            <a:pPr>
+              <a:rPr dirty="0"/>
+              <a:t>Reviewed the </a:t>
+            </a:r>
+            <a:r>
+              <a:rPr b="1" dirty="0"/>
+              <a:t>SSM view</a:t>
+            </a:r>
+            <a:r>
+              <a:rPr dirty="0"/>
+              <a:t>: inputs, hidden states, dynamics, and outputs.</a:t>
+            </a:r>
+          </a:p>
+          <a:p>
+            <a:pPr algn="just">
               <a:spcAft>
                 <a:spcPts val="800"/>
               </a:spcAft>
@@ -5378,11 +5513,21 @@
               </a:defRPr>
             </a:pPr>
             <a:r>
-              <a:t>Studied how S4 makes long-sequence modeling practical through structured state spaces.</a:t>
-            </a:r>
-          </a:p>
-          <a:p>
-            <a:pPr>
+              <a:rPr dirty="0"/>
+              <a:t>Then moved to </a:t>
+            </a:r>
+            <a:r>
+              <a:rPr b="1" dirty="0"/>
+              <a:t>Mamba</a:t>
+            </a:r>
+            <a:r>
+              <a:rPr dirty="0"/>
+              <a:t>, where the model selectively updates its state based on the input.</a:t>
+            </a:r>
+            <a:endParaRPr lang="es-MX" dirty="0"/>
+          </a:p>
+          <a:p>
+            <a:pPr algn="just">
               <a:spcAft>
                 <a:spcPts val="800"/>
               </a:spcAft>
@@ -5394,8 +5539,26 @@
               </a:defRPr>
             </a:pPr>
             <a:r>
-              <a:t>Then moved to Mamba, where the model selectively updates its state based on the input.</a:t>
-            </a:r>
+              <a:rPr lang="en-US" noProof="0" dirty="0"/>
+              <a:t>Move to </a:t>
+            </a:r>
+            <a:r>
+              <a:rPr lang="en-US" b="1" noProof="0" dirty="0"/>
+              <a:t>Vision </a:t>
+            </a:r>
+            <a:r>
+              <a:rPr lang="es-MX" altLang="ja-JP" b="1" dirty="0"/>
+              <a:t>Mamba </a:t>
+            </a:r>
+            <a:r>
+              <a:rPr lang="es-MX" altLang="ja-JP" dirty="0"/>
+              <a:t>and </a:t>
+            </a:r>
+            <a:r>
+              <a:rPr lang="es-MX" altLang="ja-JP" b="1" dirty="0"/>
+              <a:t>Video Mamba</a:t>
+            </a:r>
+            <a:endParaRPr dirty="0"/>
           </a:p>
         </p:txBody>
       </p:sp>
@@ -5477,7 +5640,7 @@
         <p:spPr>
           <a:xfrm>
             <a:off x="685800" y="1143000"/>
-            <a:ext cx="5394960" cy="4389120"/>
+            <a:ext cx="5394960" cy="3631763"/>
           </a:xfrm>
           <a:prstGeom prst="rect">
             <a:avLst/>
@@ -5490,7 +5653,7 @@
           </a:bodyPr>
           <a:lstStyle/>
           <a:p>
-            <a:pPr>
+            <a:pPr algn="just">
               <a:spcAft>
                 <a:spcPts val="800"/>
               </a:spcAft>
@@ -5502,11 +5665,32 @@
               </a:defRPr>
             </a:pPr>
             <a:r>
-              <a:t>Transformers are powerful but attention grows expensive with long sequences.</a:t>
-            </a:r>
-          </a:p>
-          <a:p>
-            <a:pPr>
+              <a:rPr b="1" dirty="0"/>
+              <a:t>Transformers</a:t>
+            </a:r>
+            <a:r>
+              <a:rPr dirty="0"/>
+              <a:t> are powerful but </a:t>
+            </a:r>
+            <a:r>
+              <a:rPr b="1" dirty="0"/>
+              <a:t>attention</a:t>
+            </a:r>
+            <a:r>
+              <a:rPr dirty="0"/>
+              <a:t> grows </a:t>
+            </a:r>
+            <a:r>
+              <a:rPr b="1" dirty="0"/>
+              <a:t>expensive</a:t>
+            </a:r>
+            <a:r>
+              <a:rPr dirty="0"/>
+              <a:t> with long sequences.</a:t>
+            </a:r>
+          </a:p>
+          <a:p>
+            <a:pPr algn="just">
               <a:spcAft>
                 <a:spcPts val="800"/>
               </a:spcAft>
@@ -5518,11 +5702,20 @@
               </a:defRPr>
             </a:pPr>
             <a:r>
-              <a:t>State Space Models offer a different path: recurrent dynamics with efficient sequence processing.</a:t>
-            </a:r>
-          </a:p>
-          <a:p>
-            <a:pPr>
+              <a:rPr b="1" dirty="0"/>
+              <a:t>State Space Models </a:t>
+            </a:r>
+            <a:r>
+              <a:rPr dirty="0"/>
+              <a:t>offer a different path: recurrent dynamics with </a:t>
+            </a:r>
+            <a:r>
+              <a:rPr b="1" dirty="0"/>
+              <a:t>efficient sequence processing.</a:t>
+            </a:r>
+          </a:p>
+          <a:p>
+            <a:pPr algn="just">
               <a:spcAft>
                 <a:spcPts val="800"/>
               </a:spcAft>
@@ -5534,11 +5727,24 @@
               </a:defRPr>
             </a:pPr>
             <a:r>
-              <a:t>Mamba keeps the long-context advantage while adding input-dependent selection.</a:t>
-            </a:r>
-          </a:p>
-          <a:p>
-            <a:pPr>
+              <a:rPr b="1" dirty="0"/>
+              <a:t>Mamba</a:t>
+            </a:r>
+            <a:r>
+              <a:rPr dirty="0"/>
+              <a:t> keeps the long-context advantage while </a:t>
+            </a:r>
+            <a:r>
+              <a:rPr b="1" dirty="0"/>
+              <a:t>adding input-dependent </a:t>
+            </a:r>
+            <a:r>
+              <a:rPr dirty="0"/>
+              <a:t>selection.</a:t>
+            </a:r>
+          </a:p>
+          <a:p>
+            <a:pPr algn="just">
               <a:spcAft>
                 <a:spcPts val="800"/>
               </a:spcAft>
@@ -5550,7 +5756,32 @@
               </a:defRPr>
             </a:pPr>
             <a:r>
-              <a:t>This is relevant for video because long clips require temporal memory without excessive cost.</a:t>
+              <a:rPr dirty="0"/>
+              <a:t>This </a:t>
+            </a:r>
+            <a:r>
+              <a:rPr b="1" dirty="0"/>
+              <a:t>is relevant for video </a:t>
+            </a:r>
+            <a:r>
+              <a:rPr dirty="0"/>
+              <a:t>because </a:t>
+            </a:r>
+            <a:r>
+              <a:rPr b="1" dirty="0"/>
+              <a:t>long</a:t>
+            </a:r>
+            <a:r>
+              <a:rPr dirty="0"/>
+              <a:t> </a:t>
+            </a:r>
+            <a:r>
+              <a:rPr b="1" dirty="0"/>
+              <a:t>clips</a:t>
+            </a:r>
+            <a:r>
+              <a:rPr dirty="0"/>
+              <a:t> require temporal memory without excessive cost.</a:t>
             </a:r>
           </a:p>
         </p:txBody>
@@ -5670,6 +5901,7 @@
               </a:defRPr>
             </a:pPr>
             <a:r>
+              <a:rPr dirty="0"/>
               <a:t>The research path is shifting from attention-based temporal modeling to state-based sequence modeling.</a:t>
             </a:r>
           </a:p>
@@ -5717,7 +5949,7 @@
         <p:spPr>
           <a:xfrm>
             <a:off x="594360" y="384048"/>
-            <a:ext cx="10972800" cy="566928"/>
+            <a:ext cx="10754226" cy="553998"/>
           </a:xfrm>
           <a:prstGeom prst="rect">
             <a:avLst/>
@@ -5739,8 +5971,18 @@
               </a:defRPr>
             </a:pPr>
             <a:r>
+              <a:rPr dirty="0"/>
               <a:t>State Space Models</a:t>
             </a:r>
+            <a:r>
+              <a:rPr lang="es-MX" dirty="0"/>
+              <a:t>: </a:t>
+            </a:r>
+            <a:r>
+              <a:rPr lang="en-US" altLang="ja-JP" sz="3000" b="1" dirty="0"/>
+              <a:t>Efficiently Modeling Long Sequences (2021)</a:t>
+            </a:r>
+            <a:endParaRPr dirty="0"/>
           </a:p>
         </p:txBody>
       </p:sp>
@@ -5753,7 +5995,7 @@
         <p:spPr>
           <a:xfrm>
             <a:off x="777240" y="1143000"/>
-            <a:ext cx="10424160" cy="2926080"/>
+            <a:ext cx="10424160" cy="1754326"/>
           </a:xfrm>
           <a:prstGeom prst="rect">
             <a:avLst/>
@@ -5766,7 +6008,7 @@
           </a:bodyPr>
           <a:lstStyle/>
           <a:p>
-            <a:pPr>
+            <a:pPr algn="just">
               <a:spcAft>
                 <a:spcPts val="800"/>
               </a:spcAft>
@@ -5778,11 +6020,12 @@
               </a:defRPr>
             </a:pPr>
             <a:r>
+              <a:rPr dirty="0"/>
               <a:t>An SSM maps an input signal into a hidden state and then projects it to an output.</a:t>
             </a:r>
           </a:p>
           <a:p>
-            <a:pPr>
+            <a:pPr algn="just">
               <a:spcAft>
                 <a:spcPts val="800"/>
               </a:spcAft>
@@ -5794,11 +6037,12 @@
               </a:defRPr>
             </a:pPr>
             <a:r>
+              <a:rPr dirty="0"/>
               <a:t>The hidden state stores information needed to describe the sequence over time.</a:t>
             </a:r>
           </a:p>
           <a:p>
-            <a:pPr>
+            <a:pPr algn="just">
               <a:spcAft>
                 <a:spcPts val="800"/>
               </a:spcAft>
@@ -5810,11 +6054,12 @@
               </a:defRPr>
             </a:pPr>
             <a:r>
+              <a:rPr b="1" dirty="0"/>
               <a:t>In discrete form, the model can be interpreted as a recurrent update.</a:t>
             </a:r>
           </a:p>
           <a:p>
-            <a:pPr>
+            <a:pPr algn="just">
               <a:spcAft>
                 <a:spcPts val="800"/>
               </a:spcAft>
@@ -5826,251 +6071,958 @@
               </a:defRPr>
             </a:pPr>
             <a:r>
+              <a:rPr dirty="0"/>
               <a:t>This provides a mathematical foundation for long-range temporal modeling.</a:t>
             </a:r>
           </a:p>
         </p:txBody>
       </p:sp>
-      <p:sp>
-        <p:nvSpPr>
-          <p:cNvPr id="4" name="Rounded Rectangle 3"/>
-          <p:cNvSpPr/>
+      <p:grpSp>
+        <p:nvGrpSpPr>
+          <p:cNvPr id="14" name="Grupo 13">
+            <a:extLst>
+              <a:ext uri="{FF2B5EF4-FFF2-40B4-BE49-F238E27FC236}">
+                <a16:creationId xmlns:a16="http://schemas.microsoft.com/office/drawing/2014/main" id="{88BEA0B3-D422-7124-62FC-2AB73650B7D6}"/>
+              </a:ext>
+            </a:extLst>
+          </p:cNvPr>
+          <p:cNvGrpSpPr/>
           <p:nvPr/>
-        </p:nvSpPr>
-        <p:spPr>
-          <a:xfrm>
-            <a:off x="1005840" y="4389120"/>
-            <a:ext cx="4572000" cy="1143000"/>
-          </a:xfrm>
-          <a:prstGeom prst="roundRect">
-            <a:avLst>
-              <a:gd name="adj" fmla="val 8000"/>
-            </a:avLst>
-          </a:prstGeom>
-          <a:solidFill>
-            <a:srgbClr val="DBEAFE"/>
-          </a:solidFill>
-          <a:ln>
+        </p:nvGrpSpPr>
+        <p:grpSpPr>
+          <a:xfrm>
+            <a:off x="408401" y="3517956"/>
+            <a:ext cx="4572000" cy="1671815"/>
+            <a:chOff x="1005840" y="4389119"/>
+            <a:chExt cx="4572000" cy="1671815"/>
+          </a:xfrm>
+        </p:grpSpPr>
+        <p:sp>
+          <p:nvSpPr>
+            <p:cNvPr id="4" name="Rounded Rectangle 3"/>
+            <p:cNvSpPr/>
+            <p:nvPr/>
+          </p:nvSpPr>
+          <p:spPr>
+            <a:xfrm>
+              <a:off x="1005840" y="4389119"/>
+              <a:ext cx="4572000" cy="1671815"/>
+            </a:xfrm>
+            <a:prstGeom prst="roundRect">
+              <a:avLst>
+                <a:gd name="adj" fmla="val 8000"/>
+              </a:avLst>
+            </a:prstGeom>
             <a:solidFill>
               <a:srgbClr val="DBEAFE"/>
             </a:solidFill>
+            <a:ln>
+              <a:solidFill>
+                <a:srgbClr val="DBEAFE"/>
+              </a:solidFill>
+            </a:ln>
+          </p:spPr>
+          <p:style>
+            <a:lnRef idx="1">
+              <a:schemeClr val="accent1"/>
+            </a:lnRef>
+            <a:fillRef idx="3">
+              <a:schemeClr val="accent1"/>
+            </a:fillRef>
+            <a:effectRef idx="2">
+              <a:schemeClr val="accent1"/>
+            </a:effectRef>
+            <a:fontRef idx="minor">
+              <a:schemeClr val="lt1"/>
+            </a:fontRef>
+          </p:style>
+          <p:txBody>
+            <a:bodyPr rtlCol="0" anchor="ctr"/>
+            <a:lstStyle/>
+            <a:p>
+              <a:pPr algn="ctr"/>
+              <a:endParaRPr/>
+            </a:p>
+          </p:txBody>
+        </p:sp>
+        <p:sp>
+          <p:nvSpPr>
+            <p:cNvPr id="6" name="TextBox 5"/>
+            <p:cNvSpPr txBox="1"/>
+            <p:nvPr/>
+          </p:nvSpPr>
+          <p:spPr>
+            <a:xfrm>
+              <a:off x="1234440" y="4645152"/>
+              <a:ext cx="4114800" cy="274320"/>
+            </a:xfrm>
+            <a:prstGeom prst="rect">
+              <a:avLst/>
+            </a:prstGeom>
+            <a:noFill/>
+          </p:spPr>
+          <p:txBody>
+            <a:bodyPr wrap="square">
+              <a:spAutoFit/>
+            </a:bodyPr>
+            <a:lstStyle/>
+            <a:p>
+              <a:pPr algn="ctr">
+                <a:defRPr sz="2200" b="1">
+                  <a:solidFill>
+                    <a:srgbClr val="1D4ED8"/>
+                  </a:solidFill>
+                  <a:latin typeface="Aptos Display"/>
+                </a:defRPr>
+              </a:pPr>
+              <a:r>
+                <a:rPr dirty="0"/>
+                <a:t>Continuous view</a:t>
+              </a:r>
+            </a:p>
+          </p:txBody>
+        </p:sp>
+        <mc:AlternateContent xmlns:mc="http://schemas.openxmlformats.org/markup-compatibility/2006">
+          <mc:Choice xmlns:a14="http://schemas.microsoft.com/office/drawing/2010/main" Requires="a14">
+            <p:sp>
+              <p:nvSpPr>
+                <p:cNvPr id="11" name="CuadroTexto 10">
+                  <a:extLst>
+                    <a:ext uri="{FF2B5EF4-FFF2-40B4-BE49-F238E27FC236}">
+                      <a16:creationId xmlns:a16="http://schemas.microsoft.com/office/drawing/2014/main" id="{D7ECB4B7-EE01-9C22-3E55-11C894653948}"/>
+                    </a:ext>
+                  </a:extLst>
+                </p:cNvPr>
+                <p:cNvSpPr txBox="1"/>
+                <p:nvPr/>
+              </p:nvSpPr>
+              <p:spPr>
+                <a:xfrm>
+                  <a:off x="2284993" y="5087008"/>
+                  <a:ext cx="2013693" cy="276999"/>
+                </a:xfrm>
+                <a:prstGeom prst="rect">
+                  <a:avLst/>
+                </a:prstGeom>
+                <a:noFill/>
+              </p:spPr>
+              <p:txBody>
+                <a:bodyPr wrap="none" lIns="0" tIns="0" rIns="0" bIns="0" rtlCol="0">
+                  <a:spAutoFit/>
+                </a:bodyPr>
+                <a:lstStyle/>
+                <a:p>
+                  <a14:m>
+                    <m:oMathPara xmlns:m="http://schemas.openxmlformats.org/officeDocument/2006/math">
+                      <m:oMathParaPr>
+                        <m:jc m:val="centerGroup"/>
+                      </m:oMathParaPr>
+                      <m:oMath xmlns:m="http://schemas.openxmlformats.org/officeDocument/2006/math">
+                        <m:sSub>
+                          <m:sSubPr>
+                            <m:ctrlPr>
+                              <a:rPr kumimoji="1" lang="en-US" altLang="ja-JP" i="1" smtClean="0">
+                                <a:latin typeface="Cambria Math" panose="02040503050406030204" pitchFamily="18" charset="0"/>
+                              </a:rPr>
+                            </m:ctrlPr>
+                          </m:sSubPr>
+                          <m:e>
+                            <m:acc>
+                              <m:accPr>
+                                <m:chr m:val="̇"/>
+                                <m:ctrlPr>
+                                  <a:rPr kumimoji="1" lang="es-MX" altLang="ja-JP" b="0" i="1" smtClean="0">
+                                    <a:latin typeface="Cambria Math" panose="02040503050406030204" pitchFamily="18" charset="0"/>
+                                  </a:rPr>
+                                </m:ctrlPr>
+                              </m:accPr>
+                              <m:e>
+                                <m:r>
+                                  <a:rPr kumimoji="1" lang="es-MX" altLang="ja-JP" b="0" i="1" smtClean="0">
+                                    <a:latin typeface="Cambria Math" panose="02040503050406030204" pitchFamily="18" charset="0"/>
+                                  </a:rPr>
+                                  <m:t>𝑥</m:t>
+                                </m:r>
+                              </m:e>
+                            </m:acc>
+                          </m:e>
+                          <m:sub>
+                            <m:r>
+                              <a:rPr kumimoji="1" lang="es-MX" altLang="ja-JP" b="0" i="1" smtClean="0">
+                                <a:latin typeface="Cambria Math" panose="02040503050406030204" pitchFamily="18" charset="0"/>
+                              </a:rPr>
+                              <m:t>𝑘</m:t>
+                            </m:r>
+                          </m:sub>
+                        </m:sSub>
+                        <m:r>
+                          <a:rPr kumimoji="1" lang="es-MX" altLang="ja-JP" b="0" i="1" smtClean="0">
+                            <a:latin typeface="Cambria Math" panose="02040503050406030204" pitchFamily="18" charset="0"/>
+                          </a:rPr>
+                          <m:t>=</m:t>
+                        </m:r>
+                        <m:r>
+                          <a:rPr kumimoji="1" lang="es-MX" altLang="ja-JP" b="0" i="1" smtClean="0">
+                            <a:latin typeface="Cambria Math" panose="02040503050406030204" pitchFamily="18" charset="0"/>
+                          </a:rPr>
+                          <m:t>𝐴𝑥</m:t>
+                        </m:r>
+                        <m:d>
+                          <m:dPr>
+                            <m:ctrlPr>
+                              <a:rPr kumimoji="1" lang="es-MX" altLang="ja-JP" b="0" i="1" smtClean="0">
+                                <a:latin typeface="Cambria Math" panose="02040503050406030204" pitchFamily="18" charset="0"/>
+                              </a:rPr>
+                            </m:ctrlPr>
+                          </m:dPr>
+                          <m:e>
+                            <m:r>
+                              <a:rPr kumimoji="1" lang="es-MX" altLang="ja-JP" b="0" i="1" smtClean="0">
+                                <a:latin typeface="Cambria Math" panose="02040503050406030204" pitchFamily="18" charset="0"/>
+                              </a:rPr>
+                              <m:t>𝑡</m:t>
+                            </m:r>
+                          </m:e>
+                        </m:d>
+                        <m:r>
+                          <a:rPr kumimoji="1" lang="es-MX" altLang="ja-JP" b="0" i="1" smtClean="0">
+                            <a:latin typeface="Cambria Math" panose="02040503050406030204" pitchFamily="18" charset="0"/>
+                          </a:rPr>
+                          <m:t>+</m:t>
+                        </m:r>
+                        <m:r>
+                          <a:rPr kumimoji="1" lang="es-MX" altLang="ja-JP" b="0" i="1" smtClean="0">
+                            <a:latin typeface="Cambria Math" panose="02040503050406030204" pitchFamily="18" charset="0"/>
+                          </a:rPr>
+                          <m:t>𝐵𝑢</m:t>
+                        </m:r>
+                        <m:r>
+                          <a:rPr kumimoji="1" lang="es-MX" altLang="ja-JP" b="0" i="1" smtClean="0">
+                            <a:latin typeface="Cambria Math" panose="02040503050406030204" pitchFamily="18" charset="0"/>
+                          </a:rPr>
+                          <m:t>(</m:t>
+                        </m:r>
+                        <m:r>
+                          <a:rPr kumimoji="1" lang="es-MX" altLang="ja-JP" b="0" i="1" smtClean="0">
+                            <a:latin typeface="Cambria Math" panose="02040503050406030204" pitchFamily="18" charset="0"/>
+                          </a:rPr>
+                          <m:t>𝑡</m:t>
+                        </m:r>
+                        <m:r>
+                          <a:rPr kumimoji="1" lang="es-MX" altLang="ja-JP" b="0" i="1" smtClean="0">
+                            <a:latin typeface="Cambria Math" panose="02040503050406030204" pitchFamily="18" charset="0"/>
+                          </a:rPr>
+                          <m:t>)</m:t>
+                        </m:r>
+                      </m:oMath>
+                    </m:oMathPara>
+                  </a14:m>
+                  <a:endParaRPr kumimoji="1" lang="ja-JP" altLang="en-US" dirty="0"/>
+                </a:p>
+              </p:txBody>
+            </p:sp>
+          </mc:Choice>
+          <mc:Fallback>
+            <p:sp>
+              <p:nvSpPr>
+                <p:cNvPr id="11" name="CuadroTexto 10">
+                  <a:extLst>
+                    <a:ext uri="{FF2B5EF4-FFF2-40B4-BE49-F238E27FC236}">
+                      <a16:creationId xmlns:a16="http://schemas.microsoft.com/office/drawing/2014/main" id="{D7ECB4B7-EE01-9C22-3E55-11C894653948}"/>
+                    </a:ext>
+                  </a:extLst>
+                </p:cNvPr>
+                <p:cNvSpPr txBox="1">
+                  <a:spLocks noRot="1" noChangeAspect="1" noMove="1" noResize="1" noEditPoints="1" noAdjustHandles="1" noChangeArrowheads="1" noChangeShapeType="1" noTextEdit="1"/>
+                </p:cNvSpPr>
+                <p:nvPr/>
+              </p:nvSpPr>
+              <p:spPr>
+                <a:xfrm>
+                  <a:off x="2284993" y="5087008"/>
+                  <a:ext cx="2013693" cy="276999"/>
+                </a:xfrm>
+                <a:prstGeom prst="rect">
+                  <a:avLst/>
+                </a:prstGeom>
+                <a:blipFill>
+                  <a:blip r:embed="rId2"/>
+                  <a:stretch>
+                    <a:fillRect l="-1212" t="-4444" r="-3939" b="-35556"/>
+                  </a:stretch>
+                </a:blipFill>
+              </p:spPr>
+              <p:txBody>
+                <a:bodyPr/>
+                <a:lstStyle/>
+                <a:p>
+                  <a:r>
+                    <a:rPr lang="ja-JP" altLang="en-US">
+                      <a:noFill/>
+                    </a:rPr>
+                    <a:t> </a:t>
+                  </a:r>
+                </a:p>
+              </p:txBody>
+            </p:sp>
+          </mc:Fallback>
+        </mc:AlternateContent>
+        <mc:AlternateContent xmlns:mc="http://schemas.openxmlformats.org/markup-compatibility/2006">
+          <mc:Choice xmlns:a14="http://schemas.microsoft.com/office/drawing/2010/main" Requires="a14">
+            <p:sp>
+              <p:nvSpPr>
+                <p:cNvPr id="12" name="CuadroTexto 11">
+                  <a:extLst>
+                    <a:ext uri="{FF2B5EF4-FFF2-40B4-BE49-F238E27FC236}">
+                      <a16:creationId xmlns:a16="http://schemas.microsoft.com/office/drawing/2014/main" id="{DCF2068B-BB7F-610C-1218-7CC8D88981CA}"/>
+                    </a:ext>
+                  </a:extLst>
+                </p:cNvPr>
+                <p:cNvSpPr txBox="1"/>
+                <p:nvPr/>
+              </p:nvSpPr>
+              <p:spPr>
+                <a:xfrm>
+                  <a:off x="2769356" y="5495964"/>
+                  <a:ext cx="1044965" cy="276999"/>
+                </a:xfrm>
+                <a:prstGeom prst="rect">
+                  <a:avLst/>
+                </a:prstGeom>
+                <a:noFill/>
+              </p:spPr>
+              <p:txBody>
+                <a:bodyPr wrap="none" lIns="0" tIns="0" rIns="0" bIns="0" rtlCol="0">
+                  <a:spAutoFit/>
+                </a:bodyPr>
+                <a:lstStyle/>
+                <a:p>
+                  <a14:m>
+                    <m:oMathPara xmlns:m="http://schemas.openxmlformats.org/officeDocument/2006/math">
+                      <m:oMathParaPr>
+                        <m:jc m:val="centerGroup"/>
+                      </m:oMathParaPr>
+                      <m:oMath xmlns:m="http://schemas.openxmlformats.org/officeDocument/2006/math">
+                        <m:r>
+                          <a:rPr kumimoji="1" lang="es-MX" altLang="ja-JP" b="0" i="1" smtClean="0">
+                            <a:latin typeface="Cambria Math" panose="02040503050406030204" pitchFamily="18" charset="0"/>
+                          </a:rPr>
+                          <m:t>𝑦</m:t>
+                        </m:r>
+                        <m:r>
+                          <a:rPr kumimoji="1" lang="es-MX" altLang="ja-JP" b="0" i="1" smtClean="0">
+                            <a:latin typeface="Cambria Math" panose="02040503050406030204" pitchFamily="18" charset="0"/>
+                          </a:rPr>
+                          <m:t>=</m:t>
+                        </m:r>
+                        <m:r>
+                          <a:rPr kumimoji="1" lang="es-MX" altLang="ja-JP" b="0" i="1" smtClean="0">
+                            <a:latin typeface="Cambria Math" panose="02040503050406030204" pitchFamily="18" charset="0"/>
+                          </a:rPr>
+                          <m:t>𝐶𝑥</m:t>
+                        </m:r>
+                        <m:d>
+                          <m:dPr>
+                            <m:ctrlPr>
+                              <a:rPr kumimoji="1" lang="es-MX" altLang="ja-JP" b="0" i="1" smtClean="0">
+                                <a:latin typeface="Cambria Math" panose="02040503050406030204" pitchFamily="18" charset="0"/>
+                              </a:rPr>
+                            </m:ctrlPr>
+                          </m:dPr>
+                          <m:e>
+                            <m:r>
+                              <a:rPr kumimoji="1" lang="es-MX" altLang="ja-JP" b="0" i="1" smtClean="0">
+                                <a:latin typeface="Cambria Math" panose="02040503050406030204" pitchFamily="18" charset="0"/>
+                              </a:rPr>
+                              <m:t>𝑡</m:t>
+                            </m:r>
+                          </m:e>
+                        </m:d>
+                      </m:oMath>
+                    </m:oMathPara>
+                  </a14:m>
+                  <a:endParaRPr kumimoji="1" lang="ja-JP" altLang="en-US" dirty="0"/>
+                </a:p>
+              </p:txBody>
+            </p:sp>
+          </mc:Choice>
+          <mc:Fallback>
+            <p:sp>
+              <p:nvSpPr>
+                <p:cNvPr id="12" name="CuadroTexto 11">
+                  <a:extLst>
+                    <a:ext uri="{FF2B5EF4-FFF2-40B4-BE49-F238E27FC236}">
+                      <a16:creationId xmlns:a16="http://schemas.microsoft.com/office/drawing/2014/main" id="{DCF2068B-BB7F-610C-1218-7CC8D88981CA}"/>
+                    </a:ext>
+                  </a:extLst>
+                </p:cNvPr>
+                <p:cNvSpPr txBox="1">
+                  <a:spLocks noRot="1" noChangeAspect="1" noMove="1" noResize="1" noEditPoints="1" noAdjustHandles="1" noChangeArrowheads="1" noChangeShapeType="1" noTextEdit="1"/>
+                </p:cNvSpPr>
+                <p:nvPr/>
+              </p:nvSpPr>
+              <p:spPr>
+                <a:xfrm>
+                  <a:off x="2769356" y="5495964"/>
+                  <a:ext cx="1044965" cy="276999"/>
+                </a:xfrm>
+                <a:prstGeom prst="rect">
+                  <a:avLst/>
+                </a:prstGeom>
+                <a:blipFill>
+                  <a:blip r:embed="rId3"/>
+                  <a:stretch>
+                    <a:fillRect l="-5233" b="-26667"/>
+                  </a:stretch>
+                </a:blipFill>
+              </p:spPr>
+              <p:txBody>
+                <a:bodyPr/>
+                <a:lstStyle/>
+                <a:p>
+                  <a:r>
+                    <a:rPr lang="ja-JP" altLang="en-US">
+                      <a:noFill/>
+                    </a:rPr>
+                    <a:t> </a:t>
+                  </a:r>
+                </a:p>
+              </p:txBody>
+            </p:sp>
+          </mc:Fallback>
+        </mc:AlternateContent>
+      </p:grpSp>
+      <p:pic>
+        <p:nvPicPr>
+          <p:cNvPr id="17" name="Imagen 16">
+            <a:extLst>
+              <a:ext uri="{FF2B5EF4-FFF2-40B4-BE49-F238E27FC236}">
+                <a16:creationId xmlns:a16="http://schemas.microsoft.com/office/drawing/2014/main" id="{AB371C2F-7D48-928A-3408-6D17C9659C49}"/>
+              </a:ext>
+            </a:extLst>
+          </p:cNvPr>
+          <p:cNvPicPr>
+            <a:picLocks noChangeAspect="1"/>
+          </p:cNvPicPr>
+          <p:nvPr/>
+        </p:nvPicPr>
+        <p:blipFill>
+          <a:blip r:embed="rId4"/>
+          <a:stretch>
+            <a:fillRect/>
+          </a:stretch>
+        </p:blipFill>
+        <p:spPr>
+          <a:xfrm>
+            <a:off x="9803816" y="3058336"/>
+            <a:ext cx="1617730" cy="2591053"/>
+          </a:xfrm>
+          <a:prstGeom prst="rect">
+            <a:avLst/>
+          </a:prstGeom>
+          <a:ln w="19050" cap="sq">
+            <a:solidFill>
+              <a:srgbClr val="000000"/>
+            </a:solidFill>
+            <a:prstDash val="dash"/>
+            <a:miter lim="800000"/>
           </a:ln>
-        </p:spPr>
-        <p:style>
-          <a:lnRef idx="1">
-            <a:schemeClr val="accent1"/>
-          </a:lnRef>
-          <a:fillRef idx="3">
-            <a:schemeClr val="accent1"/>
-          </a:fillRef>
-          <a:effectRef idx="2">
-            <a:schemeClr val="accent1"/>
-          </a:effectRef>
-          <a:fontRef idx="minor">
-            <a:schemeClr val="lt1"/>
-          </a:fontRef>
-        </p:style>
-        <p:txBody>
-          <a:bodyPr rtlCol="0" anchor="ctr"/>
-          <a:lstStyle/>
-          <a:p>
-            <a:pPr algn="ctr"/>
-            <a:endParaRPr/>
-          </a:p>
-        </p:txBody>
-      </p:sp>
-      <p:sp>
-        <p:nvSpPr>
-          <p:cNvPr id="5" name="Rounded Rectangle 4"/>
-          <p:cNvSpPr/>
+          <a:effectLst>
+            <a:outerShdw blurRad="57150" dist="50800" dir="2700000" algn="tl" rotWithShape="0">
+              <a:srgbClr val="000000">
+                <a:alpha val="40000"/>
+              </a:srgbClr>
+            </a:outerShdw>
+          </a:effectLst>
+        </p:spPr>
+      </p:pic>
+      <p:grpSp>
+        <p:nvGrpSpPr>
+          <p:cNvPr id="15" name="Grupo 14">
+            <a:extLst>
+              <a:ext uri="{FF2B5EF4-FFF2-40B4-BE49-F238E27FC236}">
+                <a16:creationId xmlns:a16="http://schemas.microsoft.com/office/drawing/2014/main" id="{B486F645-DD3E-42A8-0CBC-5F5A86DC6A67}"/>
+              </a:ext>
+            </a:extLst>
+          </p:cNvPr>
+          <p:cNvGrpSpPr/>
           <p:nvPr/>
-        </p:nvSpPr>
-        <p:spPr>
-          <a:xfrm>
-            <a:off x="6583680" y="4389120"/>
-            <a:ext cx="4572000" cy="1143000"/>
-          </a:xfrm>
-          <a:prstGeom prst="roundRect">
-            <a:avLst>
-              <a:gd name="adj" fmla="val 8000"/>
-            </a:avLst>
-          </a:prstGeom>
-          <a:solidFill>
-            <a:srgbClr val="D1FAE5"/>
-          </a:solidFill>
-          <a:ln>
+        </p:nvGrpSpPr>
+        <p:grpSpPr>
+          <a:xfrm>
+            <a:off x="5102117" y="3564380"/>
+            <a:ext cx="4572000" cy="1671814"/>
+            <a:chOff x="6583680" y="4389120"/>
+            <a:chExt cx="4572000" cy="1671814"/>
+          </a:xfrm>
+        </p:grpSpPr>
+        <p:sp>
+          <p:nvSpPr>
+            <p:cNvPr id="5" name="Rounded Rectangle 4"/>
+            <p:cNvSpPr/>
+            <p:nvPr/>
+          </p:nvSpPr>
+          <p:spPr>
+            <a:xfrm>
+              <a:off x="6583680" y="4389120"/>
+              <a:ext cx="4572000" cy="1671814"/>
+            </a:xfrm>
+            <a:prstGeom prst="roundRect">
+              <a:avLst>
+                <a:gd name="adj" fmla="val 8000"/>
+              </a:avLst>
+            </a:prstGeom>
             <a:solidFill>
               <a:srgbClr val="D1FAE5"/>
             </a:solidFill>
-          </a:ln>
-        </p:spPr>
-        <p:style>
-          <a:lnRef idx="1">
-            <a:schemeClr val="accent1"/>
-          </a:lnRef>
-          <a:fillRef idx="3">
-            <a:schemeClr val="accent1"/>
-          </a:fillRef>
-          <a:effectRef idx="2">
-            <a:schemeClr val="accent1"/>
-          </a:effectRef>
-          <a:fontRef idx="minor">
-            <a:schemeClr val="lt1"/>
-          </a:fontRef>
-        </p:style>
-        <p:txBody>
-          <a:bodyPr rtlCol="0" anchor="ctr"/>
-          <a:lstStyle/>
-          <a:p>
-            <a:pPr algn="ctr"/>
-            <a:endParaRPr/>
-          </a:p>
-        </p:txBody>
-      </p:sp>
-      <p:sp>
-        <p:nvSpPr>
-          <p:cNvPr id="6" name="TextBox 5"/>
-          <p:cNvSpPr txBox="1"/>
-          <p:nvPr/>
-        </p:nvSpPr>
-        <p:spPr>
-          <a:xfrm>
-            <a:off x="1234440" y="4645152"/>
-            <a:ext cx="4114800" cy="274320"/>
-          </a:xfrm>
-          <a:prstGeom prst="rect">
-            <a:avLst/>
-          </a:prstGeom>
-          <a:noFill/>
-        </p:spPr>
-        <p:txBody>
-          <a:bodyPr wrap="square">
-            <a:spAutoFit/>
-          </a:bodyPr>
-          <a:lstStyle/>
-          <a:p>
-            <a:pPr algn="ctr">
-              <a:defRPr sz="2200" b="1">
-                <a:solidFill>
-                  <a:srgbClr val="1D4ED8"/>
-                </a:solidFill>
-                <a:latin typeface="Aptos Display"/>
-              </a:defRPr>
-            </a:pPr>
-            <a:r>
-              <a:t>Continuous view</a:t>
-            </a:r>
-          </a:p>
-        </p:txBody>
-      </p:sp>
-      <p:sp>
-        <p:nvSpPr>
-          <p:cNvPr id="7" name="TextBox 6"/>
-          <p:cNvSpPr txBox="1"/>
-          <p:nvPr/>
-        </p:nvSpPr>
-        <p:spPr>
-          <a:xfrm>
-            <a:off x="1234440" y="4983480"/>
-            <a:ext cx="4114800" cy="274320"/>
-          </a:xfrm>
-          <a:prstGeom prst="rect">
-            <a:avLst/>
-          </a:prstGeom>
-          <a:noFill/>
-        </p:spPr>
-        <p:txBody>
-          <a:bodyPr wrap="square">
-            <a:spAutoFit/>
-          </a:bodyPr>
-          <a:lstStyle/>
-          <a:p>
-            <a:pPr algn="ctr">
-              <a:defRPr sz="1800" b="0">
-                <a:solidFill>
-                  <a:srgbClr val="4B5563"/>
-                </a:solidFill>
-                <a:latin typeface="Aptos"/>
-              </a:defRPr>
-            </a:pPr>
-            <a:r>
-              <a:t>x'(t) = Ax(t) + Bu(t)</a:t>
-            </a:r>
-          </a:p>
-        </p:txBody>
-      </p:sp>
-      <p:sp>
-        <p:nvSpPr>
-          <p:cNvPr id="8" name="TextBox 7"/>
-          <p:cNvSpPr txBox="1"/>
-          <p:nvPr/>
-        </p:nvSpPr>
-        <p:spPr>
-          <a:xfrm>
-            <a:off x="6812280" y="4645152"/>
-            <a:ext cx="4114800" cy="274320"/>
-          </a:xfrm>
-          <a:prstGeom prst="rect">
-            <a:avLst/>
-          </a:prstGeom>
-          <a:noFill/>
-        </p:spPr>
-        <p:txBody>
-          <a:bodyPr wrap="square">
-            <a:spAutoFit/>
-          </a:bodyPr>
-          <a:lstStyle/>
-          <a:p>
-            <a:pPr algn="ctr">
-              <a:defRPr sz="2200" b="1">
-                <a:solidFill>
-                  <a:srgbClr val="047857"/>
-                </a:solidFill>
-                <a:latin typeface="Aptos Display"/>
-              </a:defRPr>
-            </a:pPr>
-            <a:r>
-              <a:t>Discrete view</a:t>
-            </a:r>
-          </a:p>
-        </p:txBody>
-      </p:sp>
-      <p:sp>
-        <p:nvSpPr>
-          <p:cNvPr id="9" name="TextBox 8"/>
-          <p:cNvSpPr txBox="1"/>
-          <p:nvPr/>
-        </p:nvSpPr>
-        <p:spPr>
-          <a:xfrm>
-            <a:off x="6812280" y="4983480"/>
-            <a:ext cx="4114800" cy="274320"/>
-          </a:xfrm>
-          <a:prstGeom prst="rect">
-            <a:avLst/>
-          </a:prstGeom>
-          <a:noFill/>
-        </p:spPr>
-        <p:txBody>
-          <a:bodyPr wrap="square">
-            <a:spAutoFit/>
-          </a:bodyPr>
-          <a:lstStyle/>
-          <a:p>
-            <a:pPr algn="ctr">
-              <a:defRPr sz="1800" b="0">
-                <a:solidFill>
-                  <a:srgbClr val="4B5563"/>
-                </a:solidFill>
-                <a:latin typeface="Aptos"/>
-              </a:defRPr>
-            </a:pPr>
-            <a:r>
-              <a:t>x_k = A_bar x_{k-1} + B_bar u_k</a:t>
-            </a:r>
-          </a:p>
-        </p:txBody>
-      </p:sp>
+            <a:ln>
+              <a:solidFill>
+                <a:srgbClr val="D1FAE5"/>
+              </a:solidFill>
+            </a:ln>
+          </p:spPr>
+          <p:style>
+            <a:lnRef idx="1">
+              <a:schemeClr val="accent1"/>
+            </a:lnRef>
+            <a:fillRef idx="3">
+              <a:schemeClr val="accent1"/>
+            </a:fillRef>
+            <a:effectRef idx="2">
+              <a:schemeClr val="accent1"/>
+            </a:effectRef>
+            <a:fontRef idx="minor">
+              <a:schemeClr val="lt1"/>
+            </a:fontRef>
+          </p:style>
+          <p:txBody>
+            <a:bodyPr rtlCol="0" anchor="ctr"/>
+            <a:lstStyle/>
+            <a:p>
+              <a:pPr algn="ctr"/>
+              <a:endParaRPr dirty="0"/>
+            </a:p>
+          </p:txBody>
+        </p:sp>
+        <p:sp>
+          <p:nvSpPr>
+            <p:cNvPr id="8" name="TextBox 7"/>
+            <p:cNvSpPr txBox="1"/>
+            <p:nvPr/>
+          </p:nvSpPr>
+          <p:spPr>
+            <a:xfrm>
+              <a:off x="6812280" y="4645152"/>
+              <a:ext cx="4114800" cy="274320"/>
+            </a:xfrm>
+            <a:prstGeom prst="rect">
+              <a:avLst/>
+            </a:prstGeom>
+            <a:noFill/>
+          </p:spPr>
+          <p:txBody>
+            <a:bodyPr wrap="square">
+              <a:spAutoFit/>
+            </a:bodyPr>
+            <a:lstStyle/>
+            <a:p>
+              <a:pPr algn="ctr">
+                <a:defRPr sz="2200" b="1">
+                  <a:solidFill>
+                    <a:srgbClr val="047857"/>
+                  </a:solidFill>
+                  <a:latin typeface="Aptos Display"/>
+                </a:defRPr>
+              </a:pPr>
+              <a:r>
+                <a:rPr dirty="0"/>
+                <a:t>Discrete view</a:t>
+              </a:r>
+            </a:p>
+          </p:txBody>
+        </p:sp>
+        <mc:AlternateContent xmlns:mc="http://schemas.openxmlformats.org/markup-compatibility/2006">
+          <mc:Choice xmlns:a14="http://schemas.microsoft.com/office/drawing/2010/main" Requires="a14">
+            <p:sp>
+              <p:nvSpPr>
+                <p:cNvPr id="10" name="CuadroTexto 9">
+                  <a:extLst>
+                    <a:ext uri="{FF2B5EF4-FFF2-40B4-BE49-F238E27FC236}">
+                      <a16:creationId xmlns:a16="http://schemas.microsoft.com/office/drawing/2014/main" id="{8AA6D11F-2EFE-999C-3293-A3C5D00646A9}"/>
+                    </a:ext>
+                  </a:extLst>
+                </p:cNvPr>
+                <p:cNvSpPr txBox="1"/>
+                <p:nvPr/>
+              </p:nvSpPr>
+              <p:spPr>
+                <a:xfrm>
+                  <a:off x="7904255" y="5087008"/>
+                  <a:ext cx="1930850" cy="277576"/>
+                </a:xfrm>
+                <a:prstGeom prst="rect">
+                  <a:avLst/>
+                </a:prstGeom>
+                <a:noFill/>
+              </p:spPr>
+              <p:txBody>
+                <a:bodyPr wrap="none" lIns="0" tIns="0" rIns="0" bIns="0" rtlCol="0">
+                  <a:spAutoFit/>
+                </a:bodyPr>
+                <a:lstStyle/>
+                <a:p>
+                  <a14:m>
+                    <m:oMathPara xmlns:m="http://schemas.openxmlformats.org/officeDocument/2006/math">
+                      <m:oMathParaPr>
+                        <m:jc m:val="centerGroup"/>
+                      </m:oMathParaPr>
+                      <m:oMath xmlns:m="http://schemas.openxmlformats.org/officeDocument/2006/math">
+                        <m:sSub>
+                          <m:sSubPr>
+                            <m:ctrlPr>
+                              <a:rPr kumimoji="1" lang="en-US" altLang="ja-JP" i="1" smtClean="0">
+                                <a:latin typeface="Cambria Math" panose="02040503050406030204" pitchFamily="18" charset="0"/>
+                              </a:rPr>
+                            </m:ctrlPr>
+                          </m:sSubPr>
+                          <m:e>
+                            <m:r>
+                              <a:rPr kumimoji="1" lang="es-MX" altLang="ja-JP" b="0" i="1" smtClean="0">
+                                <a:latin typeface="Cambria Math" panose="02040503050406030204" pitchFamily="18" charset="0"/>
+                              </a:rPr>
+                              <m:t>𝑥</m:t>
+                            </m:r>
+                          </m:e>
+                          <m:sub>
+                            <m:r>
+                              <a:rPr kumimoji="1" lang="es-MX" altLang="ja-JP" b="0" i="1" smtClean="0">
+                                <a:latin typeface="Cambria Math" panose="02040503050406030204" pitchFamily="18" charset="0"/>
+                              </a:rPr>
+                              <m:t>𝑘</m:t>
+                            </m:r>
+                          </m:sub>
+                        </m:sSub>
+                        <m:r>
+                          <a:rPr kumimoji="1" lang="es-MX" altLang="ja-JP" b="0" i="1" smtClean="0">
+                            <a:latin typeface="Cambria Math" panose="02040503050406030204" pitchFamily="18" charset="0"/>
+                          </a:rPr>
+                          <m:t>=</m:t>
+                        </m:r>
+                        <m:acc>
+                          <m:accPr>
+                            <m:chr m:val="̅"/>
+                            <m:ctrlPr>
+                              <a:rPr kumimoji="1" lang="es-MX" altLang="ja-JP" b="0" i="1" smtClean="0">
+                                <a:latin typeface="Cambria Math" panose="02040503050406030204" pitchFamily="18" charset="0"/>
+                              </a:rPr>
+                            </m:ctrlPr>
+                          </m:accPr>
+                          <m:e>
+                            <m:r>
+                              <a:rPr kumimoji="1" lang="es-MX" altLang="ja-JP" b="0" i="1" smtClean="0">
+                                <a:latin typeface="Cambria Math" panose="02040503050406030204" pitchFamily="18" charset="0"/>
+                              </a:rPr>
+                              <m:t>𝐴</m:t>
+                            </m:r>
+                          </m:e>
+                        </m:acc>
+                        <m:sSub>
+                          <m:sSubPr>
+                            <m:ctrlPr>
+                              <a:rPr kumimoji="1" lang="en-US" altLang="ja-JP" i="1" smtClean="0">
+                                <a:latin typeface="Cambria Math" panose="02040503050406030204" pitchFamily="18" charset="0"/>
+                              </a:rPr>
+                            </m:ctrlPr>
+                          </m:sSubPr>
+                          <m:e>
+                            <m:r>
+                              <a:rPr kumimoji="1" lang="es-MX" altLang="ja-JP" b="0" i="1" smtClean="0">
+                                <a:latin typeface="Cambria Math" panose="02040503050406030204" pitchFamily="18" charset="0"/>
+                              </a:rPr>
+                              <m:t>𝑥</m:t>
+                            </m:r>
+                          </m:e>
+                          <m:sub>
+                            <m:r>
+                              <a:rPr kumimoji="1" lang="es-MX" altLang="ja-JP" b="0" i="1" smtClean="0">
+                                <a:latin typeface="Cambria Math" panose="02040503050406030204" pitchFamily="18" charset="0"/>
+                              </a:rPr>
+                              <m:t>𝑘</m:t>
+                            </m:r>
+                            <m:r>
+                              <a:rPr kumimoji="1" lang="es-MX" altLang="ja-JP" b="0" i="1" smtClean="0">
+                                <a:latin typeface="Cambria Math" panose="02040503050406030204" pitchFamily="18" charset="0"/>
+                              </a:rPr>
+                              <m:t>−1</m:t>
+                            </m:r>
+                          </m:sub>
+                        </m:sSub>
+                        <m:r>
+                          <a:rPr kumimoji="1" lang="es-MX" altLang="ja-JP" b="0" i="1" smtClean="0">
+                            <a:latin typeface="Cambria Math" panose="02040503050406030204" pitchFamily="18" charset="0"/>
+                          </a:rPr>
+                          <m:t>+</m:t>
+                        </m:r>
+                        <m:acc>
+                          <m:accPr>
+                            <m:chr m:val="̅"/>
+                            <m:ctrlPr>
+                              <a:rPr kumimoji="1" lang="es-MX" altLang="ja-JP" b="0" i="1" smtClean="0">
+                                <a:latin typeface="Cambria Math" panose="02040503050406030204" pitchFamily="18" charset="0"/>
+                              </a:rPr>
+                            </m:ctrlPr>
+                          </m:accPr>
+                          <m:e>
+                            <m:r>
+                              <a:rPr kumimoji="1" lang="es-MX" altLang="ja-JP" b="0" i="1" smtClean="0">
+                                <a:latin typeface="Cambria Math" panose="02040503050406030204" pitchFamily="18" charset="0"/>
+                              </a:rPr>
+                              <m:t>𝐵</m:t>
+                            </m:r>
+                          </m:e>
+                        </m:acc>
+                        <m:sSub>
+                          <m:sSubPr>
+                            <m:ctrlPr>
+                              <a:rPr kumimoji="1" lang="en-US" altLang="ja-JP" i="1" smtClean="0">
+                                <a:latin typeface="Cambria Math" panose="02040503050406030204" pitchFamily="18" charset="0"/>
+                              </a:rPr>
+                            </m:ctrlPr>
+                          </m:sSubPr>
+                          <m:e>
+                            <m:r>
+                              <a:rPr kumimoji="1" lang="es-MX" altLang="ja-JP" b="0" i="1" smtClean="0">
+                                <a:latin typeface="Cambria Math" panose="02040503050406030204" pitchFamily="18" charset="0"/>
+                              </a:rPr>
+                              <m:t>𝑢</m:t>
+                            </m:r>
+                          </m:e>
+                          <m:sub>
+                            <m:r>
+                              <a:rPr kumimoji="1" lang="es-MX" altLang="ja-JP" b="0" i="1" smtClean="0">
+                                <a:latin typeface="Cambria Math" panose="02040503050406030204" pitchFamily="18" charset="0"/>
+                              </a:rPr>
+                              <m:t>𝑘</m:t>
+                            </m:r>
+                          </m:sub>
+                        </m:sSub>
+                      </m:oMath>
+                    </m:oMathPara>
+                  </a14:m>
+                  <a:endParaRPr kumimoji="1" lang="ja-JP" altLang="en-US" dirty="0"/>
+                </a:p>
+              </p:txBody>
+            </p:sp>
+          </mc:Choice>
+          <mc:Fallback>
+            <p:sp>
+              <p:nvSpPr>
+                <p:cNvPr id="10" name="CuadroTexto 9">
+                  <a:extLst>
+                    <a:ext uri="{FF2B5EF4-FFF2-40B4-BE49-F238E27FC236}">
+                      <a16:creationId xmlns:a16="http://schemas.microsoft.com/office/drawing/2014/main" id="{8AA6D11F-2EFE-999C-3293-A3C5D00646A9}"/>
+                    </a:ext>
+                  </a:extLst>
+                </p:cNvPr>
+                <p:cNvSpPr txBox="1">
+                  <a:spLocks noRot="1" noChangeAspect="1" noMove="1" noResize="1" noEditPoints="1" noAdjustHandles="1" noChangeArrowheads="1" noChangeShapeType="1" noTextEdit="1"/>
+                </p:cNvSpPr>
+                <p:nvPr/>
+              </p:nvSpPr>
+              <p:spPr>
+                <a:xfrm>
+                  <a:off x="7904255" y="5087008"/>
+                  <a:ext cx="1930850" cy="277576"/>
+                </a:xfrm>
+                <a:prstGeom prst="rect">
+                  <a:avLst/>
+                </a:prstGeom>
+                <a:blipFill>
+                  <a:blip r:embed="rId5"/>
+                  <a:stretch>
+                    <a:fillRect t="-2174" r="-949" b="-17391"/>
+                  </a:stretch>
+                </a:blipFill>
+              </p:spPr>
+              <p:txBody>
+                <a:bodyPr/>
+                <a:lstStyle/>
+                <a:p>
+                  <a:r>
+                    <a:rPr lang="ja-JP" altLang="en-US">
+                      <a:noFill/>
+                    </a:rPr>
+                    <a:t> </a:t>
+                  </a:r>
+                </a:p>
+              </p:txBody>
+            </p:sp>
+          </mc:Fallback>
+        </mc:AlternateContent>
+        <mc:AlternateContent xmlns:mc="http://schemas.openxmlformats.org/markup-compatibility/2006">
+          <mc:Choice xmlns:a14="http://schemas.microsoft.com/office/drawing/2010/main" Requires="a14">
+            <p:sp>
+              <p:nvSpPr>
+                <p:cNvPr id="13" name="CuadroTexto 12">
+                  <a:extLst>
+                    <a:ext uri="{FF2B5EF4-FFF2-40B4-BE49-F238E27FC236}">
+                      <a16:creationId xmlns:a16="http://schemas.microsoft.com/office/drawing/2014/main" id="{0673DF54-8633-5881-8351-A9D34D31BBE1}"/>
+                    </a:ext>
+                  </a:extLst>
+                </p:cNvPr>
+                <p:cNvSpPr txBox="1"/>
+                <p:nvPr/>
+              </p:nvSpPr>
+              <p:spPr>
+                <a:xfrm>
+                  <a:off x="8559709" y="5495387"/>
+                  <a:ext cx="980461" cy="277576"/>
+                </a:xfrm>
+                <a:prstGeom prst="rect">
+                  <a:avLst/>
+                </a:prstGeom>
+                <a:noFill/>
+              </p:spPr>
+              <p:txBody>
+                <a:bodyPr wrap="none" lIns="0" tIns="0" rIns="0" bIns="0" rtlCol="0">
+                  <a:spAutoFit/>
+                </a:bodyPr>
+                <a:lstStyle/>
+                <a:p>
+                  <a14:m>
+                    <m:oMathPara xmlns:m="http://schemas.openxmlformats.org/officeDocument/2006/math">
+                      <m:oMathParaPr>
+                        <m:jc m:val="centerGroup"/>
+                      </m:oMathParaPr>
+                      <m:oMath xmlns:m="http://schemas.openxmlformats.org/officeDocument/2006/math">
+                        <m:sSub>
+                          <m:sSubPr>
+                            <m:ctrlPr>
+                              <a:rPr kumimoji="1" lang="en-US" altLang="ja-JP" i="1" smtClean="0">
+                                <a:latin typeface="Cambria Math" panose="02040503050406030204" pitchFamily="18" charset="0"/>
+                              </a:rPr>
+                            </m:ctrlPr>
+                          </m:sSubPr>
+                          <m:e>
+                            <m:r>
+                              <a:rPr kumimoji="1" lang="es-MX" altLang="ja-JP" b="0" i="1" smtClean="0">
+                                <a:latin typeface="Cambria Math" panose="02040503050406030204" pitchFamily="18" charset="0"/>
+                              </a:rPr>
+                              <m:t>𝑦</m:t>
+                            </m:r>
+                          </m:e>
+                          <m:sub>
+                            <m:r>
+                              <a:rPr kumimoji="1" lang="es-MX" altLang="ja-JP" b="0" i="1" smtClean="0">
+                                <a:latin typeface="Cambria Math" panose="02040503050406030204" pitchFamily="18" charset="0"/>
+                              </a:rPr>
+                              <m:t>𝑘</m:t>
+                            </m:r>
+                          </m:sub>
+                        </m:sSub>
+                        <m:r>
+                          <a:rPr kumimoji="1" lang="es-MX" altLang="ja-JP" b="0" i="1" smtClean="0">
+                            <a:latin typeface="Cambria Math" panose="02040503050406030204" pitchFamily="18" charset="0"/>
+                          </a:rPr>
+                          <m:t>=</m:t>
+                        </m:r>
+                        <m:acc>
+                          <m:accPr>
+                            <m:chr m:val="̅"/>
+                            <m:ctrlPr>
+                              <a:rPr kumimoji="1" lang="es-MX" altLang="ja-JP" b="0" i="1" smtClean="0">
+                                <a:latin typeface="Cambria Math" panose="02040503050406030204" pitchFamily="18" charset="0"/>
+                              </a:rPr>
+                            </m:ctrlPr>
+                          </m:accPr>
+                          <m:e>
+                            <m:r>
+                              <a:rPr kumimoji="1" lang="es-MX" altLang="ja-JP" b="0" i="1" smtClean="0">
+                                <a:latin typeface="Cambria Math" panose="02040503050406030204" pitchFamily="18" charset="0"/>
+                              </a:rPr>
+                              <m:t>𝐶</m:t>
+                            </m:r>
+                          </m:e>
+                        </m:acc>
+                        <m:sSub>
+                          <m:sSubPr>
+                            <m:ctrlPr>
+                              <a:rPr kumimoji="1" lang="en-US" altLang="ja-JP" i="1" smtClean="0">
+                                <a:latin typeface="Cambria Math" panose="02040503050406030204" pitchFamily="18" charset="0"/>
+                              </a:rPr>
+                            </m:ctrlPr>
+                          </m:sSubPr>
+                          <m:e>
+                            <m:r>
+                              <a:rPr kumimoji="1" lang="es-MX" altLang="ja-JP" b="0" i="1" smtClean="0">
+                                <a:latin typeface="Cambria Math" panose="02040503050406030204" pitchFamily="18" charset="0"/>
+                              </a:rPr>
+                              <m:t>𝑥</m:t>
+                            </m:r>
+                          </m:e>
+                          <m:sub>
+                            <m:r>
+                              <a:rPr kumimoji="1" lang="es-MX" altLang="ja-JP" b="0" i="1" smtClean="0">
+                                <a:latin typeface="Cambria Math" panose="02040503050406030204" pitchFamily="18" charset="0"/>
+                              </a:rPr>
+                              <m:t>𝑘</m:t>
+                            </m:r>
+                          </m:sub>
+                        </m:sSub>
+                      </m:oMath>
+                    </m:oMathPara>
+                  </a14:m>
+                  <a:endParaRPr kumimoji="1" lang="ja-JP" altLang="en-US" dirty="0"/>
+                </a:p>
+              </p:txBody>
+            </p:sp>
+          </mc:Choice>
+          <mc:Fallback>
+            <p:sp>
+              <p:nvSpPr>
+                <p:cNvPr id="13" name="CuadroTexto 12">
+                  <a:extLst>
+                    <a:ext uri="{FF2B5EF4-FFF2-40B4-BE49-F238E27FC236}">
+                      <a16:creationId xmlns:a16="http://schemas.microsoft.com/office/drawing/2014/main" id="{0673DF54-8633-5881-8351-A9D34D31BBE1}"/>
+                    </a:ext>
+                  </a:extLst>
+                </p:cNvPr>
+                <p:cNvSpPr txBox="1">
+                  <a:spLocks noRot="1" noChangeAspect="1" noMove="1" noResize="1" noEditPoints="1" noAdjustHandles="1" noChangeArrowheads="1" noChangeShapeType="1" noTextEdit="1"/>
+                </p:cNvSpPr>
+                <p:nvPr/>
+              </p:nvSpPr>
+              <p:spPr>
+                <a:xfrm>
+                  <a:off x="8559709" y="5495387"/>
+                  <a:ext cx="980461" cy="277576"/>
+                </a:xfrm>
+                <a:prstGeom prst="rect">
+                  <a:avLst/>
+                </a:prstGeom>
+                <a:blipFill>
+                  <a:blip r:embed="rId6"/>
+                  <a:stretch>
+                    <a:fillRect l="-5590" t="-2174" r="-9938" b="-26087"/>
+                  </a:stretch>
+                </a:blipFill>
+              </p:spPr>
+              <p:txBody>
+                <a:bodyPr/>
+                <a:lstStyle/>
+                <a:p>
+                  <a:r>
+                    <a:rPr lang="ja-JP" altLang="en-US">
+                      <a:noFill/>
+                    </a:rPr>
+                    <a:t> </a:t>
+                  </a:r>
+                </a:p>
+              </p:txBody>
+            </p:sp>
+          </mc:Fallback>
+        </mc:AlternateContent>
+      </p:grpSp>
     </p:spTree>
   </p:cSld>
   <p:clrMapOvr>
@@ -6135,6 +7087,7 @@
               </a:defRPr>
             </a:pPr>
             <a:r>
+              <a:rPr dirty="0"/>
               <a:t>S4: Structured State Spaces</a:t>
             </a:r>
           </a:p>
@@ -6149,7 +7102,7 @@
         <p:spPr>
           <a:xfrm>
             <a:off x="777240" y="1170432"/>
-            <a:ext cx="10424160" cy="4480560"/>
+            <a:ext cx="10424160" cy="2523768"/>
           </a:xfrm>
           <a:prstGeom prst="rect">
             <a:avLst/>
@@ -6162,7 +7115,7 @@
           </a:bodyPr>
           <a:lstStyle/>
           <a:p>
-            <a:pPr>
+            <a:pPr algn="just">
               <a:spcAft>
                 <a:spcPts val="800"/>
               </a:spcAft>
@@ -6174,11 +7127,12 @@
               </a:defRPr>
             </a:pPr>
             <a:r>
+              <a:rPr dirty="0"/>
               <a:t>S4 is designed to make State Space Models practical for very long sequences.</a:t>
             </a:r>
           </a:p>
           <a:p>
-            <a:pPr>
+            <a:pPr algn="just">
               <a:spcAft>
                 <a:spcPts val="800"/>
               </a:spcAft>
@@ -6190,11 +7144,20 @@
               </a:defRPr>
             </a:pPr>
             <a:r>
-              <a:t>The same model can be viewed as recurrent for inference and convolutional for parallel training.</a:t>
-            </a:r>
-          </a:p>
-          <a:p>
-            <a:pPr>
+              <a:rPr dirty="0"/>
+              <a:t>The same model can be viewed as </a:t>
+            </a:r>
+            <a:r>
+              <a:rPr b="1" dirty="0"/>
+              <a:t>recurrent for inference and convolutional for parallel</a:t>
+            </a:r>
+            <a:r>
+              <a:rPr dirty="0"/>
+              <a:t> training.</a:t>
+            </a:r>
+          </a:p>
+          <a:p>
+            <a:pPr algn="just">
               <a:spcAft>
                 <a:spcPts val="800"/>
               </a:spcAft>
@@ -6206,11 +7169,20 @@
               </a:defRPr>
             </a:pPr>
             <a:r>
-              <a:t>This is the important bridge: stateful memory without giving up efficient computation.</a:t>
-            </a:r>
-          </a:p>
-          <a:p>
-            <a:pPr>
+              <a:rPr dirty="0"/>
+              <a:t>This is the important bridge: </a:t>
+            </a:r>
+            <a:r>
+              <a:rPr b="1" dirty="0"/>
+              <a:t>stateful memory without giving up efficient computation</a:t>
+            </a:r>
+            <a:r>
+              <a:rPr dirty="0"/>
+              <a:t>.</a:t>
+            </a:r>
+          </a:p>
+          <a:p>
+            <a:pPr algn="just">
               <a:spcAft>
                 <a:spcPts val="800"/>
               </a:spcAft>
@@ -6222,6 +7194,7 @@
               </a:defRPr>
             </a:pPr>
             <a:r>
+              <a:rPr dirty="0"/>
               <a:t>S4 establishes the foundation that Mamba later modifies with selection.</a:t>
             </a:r>
           </a:p>
@@ -6737,7 +7710,7 @@
         <p:spPr>
           <a:xfrm>
             <a:off x="594360" y="384048"/>
-            <a:ext cx="10972800" cy="566928"/>
+            <a:ext cx="6496650" cy="553998"/>
           </a:xfrm>
           <a:prstGeom prst="rect">
             <a:avLst/>
@@ -6759,8 +7732,14 @@
               </a:defRPr>
             </a:pPr>
             <a:r>
+              <a:rPr dirty="0"/>
               <a:t>Mamba: Selective State Spaces</a:t>
             </a:r>
+            <a:r>
+              <a:rPr lang="es-MX" dirty="0"/>
+              <a:t> (2023)</a:t>
+            </a:r>
+            <a:endParaRPr dirty="0"/>
           </a:p>
         </p:txBody>
       </p:sp>
@@ -6816,7 +7795,15 @@
             </a:pPr>
             <a:r>
               <a:rPr dirty="0"/>
-              <a:t>The model can make its dynamics depend on the input sequence.</a:t>
+              <a:t>The model can make its dynamics </a:t>
+            </a:r>
+            <a:r>
+              <a:rPr b="1" dirty="0"/>
+              <a:t>depend on the input sequence</a:t>
+            </a:r>
+            <a:r>
+              <a:rPr dirty="0"/>
+              <a:t>.</a:t>
             </a:r>
           </a:p>
           <a:p>
@@ -6833,7 +7820,15 @@
             </a:pPr>
             <a:r>
               <a:rPr dirty="0"/>
-              <a:t>This helps it filter relevant information and ignore less useful tokens.</a:t>
+              <a:t>This helps it </a:t>
+            </a:r>
+            <a:r>
+              <a:rPr b="1" dirty="0"/>
+              <a:t>filter relevant information and ignore less useful tokens</a:t>
+            </a:r>
+            <a:r>
+              <a:rPr dirty="0"/>
+              <a:t>.</a:t>
             </a:r>
           </a:p>
           <a:p>
@@ -6873,6 +7868,37 @@
           <a:xfrm>
             <a:off x="685800" y="2949185"/>
             <a:ext cx="10492881" cy="3235305"/>
+          </a:xfrm>
+          <a:prstGeom prst="rect">
+            <a:avLst/>
+          </a:prstGeom>
+        </p:spPr>
+      </p:pic>
+      <p:pic>
+        <p:nvPicPr>
+          <p:cNvPr id="6" name="Imagen 5">
+            <a:extLst>
+              <a:ext uri="{FF2B5EF4-FFF2-40B4-BE49-F238E27FC236}">
+                <a16:creationId xmlns:a16="http://schemas.microsoft.com/office/drawing/2014/main" id="{4D733505-0F9D-7190-DB1C-1B71B874EB6E}"/>
+              </a:ext>
+            </a:extLst>
+          </p:cNvPr>
+          <p:cNvPicPr>
+            <a:picLocks noChangeAspect="1"/>
+          </p:cNvPicPr>
+          <p:nvPr/>
+        </p:nvPicPr>
+        <p:blipFill>
+          <a:blip r:embed="rId3"/>
+          <a:srcRect l="28305" t="41233" r="25425" b="16077"/>
+          <a:stretch>
+            <a:fillRect/>
+          </a:stretch>
+        </p:blipFill>
+        <p:spPr>
+          <a:xfrm>
+            <a:off x="8792555" y="876591"/>
+            <a:ext cx="2225965" cy="797098"/>
           </a:xfrm>
           <a:prstGeom prst="rect">
             <a:avLst/>
@@ -6965,8 +7991,8 @@
         </p:blipFill>
         <p:spPr>
           <a:xfrm>
-            <a:off x="868680" y="1078992"/>
-            <a:ext cx="3886200" cy="3337560"/>
+            <a:off x="1916535" y="950976"/>
+            <a:ext cx="3746715" cy="3217767"/>
           </a:xfrm>
           <a:prstGeom prst="rect">
             <a:avLst/>
@@ -6981,8 +8007,8 @@
         </p:nvSpPr>
         <p:spPr>
           <a:xfrm>
-            <a:off x="5532120" y="1188720"/>
-            <a:ext cx="5394960" cy="4297680"/>
+            <a:off x="5663250" y="1188720"/>
+            <a:ext cx="5263830" cy="3308598"/>
           </a:xfrm>
           <a:prstGeom prst="rect">
             <a:avLst/>
@@ -7007,6 +8033,7 @@
               </a:defRPr>
             </a:pPr>
             <a:r>
+              <a:rPr dirty="0"/>
               <a:t>The block combines projection, selective SSM computation, gating, and output projection.</a:t>
             </a:r>
           </a:p>
@@ -7023,6 +8050,7 @@
               </a:defRPr>
             </a:pPr>
             <a:r>
+              <a:rPr dirty="0"/>
               <a:t>Gating controls how much information passes through the block.</a:t>
             </a:r>
           </a:p>
@@ -7039,6 +8067,7 @@
               </a:defRPr>
             </a:pPr>
             <a:r>
+              <a:rPr dirty="0"/>
               <a:t>The selective scan allows recurrent-style processing to remain efficient.</a:t>
             </a:r>
           </a:p>
@@ -7055,11 +8084,42 @@
               </a:defRPr>
             </a:pPr>
             <a:r>
+              <a:rPr dirty="0"/>
               <a:t>This block becomes the reusable unit for later vision and video variants.</a:t>
             </a:r>
           </a:p>
         </p:txBody>
       </p:sp>
+      <p:pic>
+        <p:nvPicPr>
+          <p:cNvPr id="6" name="Imagen 5">
+            <a:extLst>
+              <a:ext uri="{FF2B5EF4-FFF2-40B4-BE49-F238E27FC236}">
+                <a16:creationId xmlns:a16="http://schemas.microsoft.com/office/drawing/2014/main" id="{96010AFF-14B8-71E3-B44F-9A8CB56E5155}"/>
+              </a:ext>
+            </a:extLst>
+          </p:cNvPr>
+          <p:cNvPicPr>
+            <a:picLocks noChangeAspect="1"/>
+          </p:cNvPicPr>
+          <p:nvPr/>
+        </p:nvPicPr>
+        <p:blipFill>
+          <a:blip r:embed="rId3"/>
+          <a:stretch>
+            <a:fillRect/>
+          </a:stretch>
+        </p:blipFill>
+        <p:spPr>
+          <a:xfrm>
+            <a:off x="1264920" y="4115634"/>
+            <a:ext cx="3588770" cy="2741532"/>
+          </a:xfrm>
+          <a:prstGeom prst="rect">
+            <a:avLst/>
+          </a:prstGeom>
+        </p:spPr>
+      </p:pic>
     </p:spTree>
   </p:cSld>
   <p:clrMapOvr>
@@ -7150,10 +8210,114 @@
               <a:t>Mamba </a:t>
             </a:r>
             <a:r>
-              <a:rPr lang="es-MX" dirty="0" err="1"/>
+              <a:rPr lang="en-US" noProof="0" dirty="0"/>
               <a:t>Perplexity</a:t>
             </a:r>
             <a:endParaRPr dirty="0"/>
+          </a:p>
+        </p:txBody>
+      </p:sp>
+      <p:sp>
+        <p:nvSpPr>
+          <p:cNvPr id="3" name="Rectángulo 2">
+            <a:extLst>
+              <a:ext uri="{FF2B5EF4-FFF2-40B4-BE49-F238E27FC236}">
+                <a16:creationId xmlns:a16="http://schemas.microsoft.com/office/drawing/2014/main" id="{6CCE2411-4070-0625-3693-A47147A45C9F}"/>
+              </a:ext>
+            </a:extLst>
+          </p:cNvPr>
+          <p:cNvSpPr/>
+          <p:nvPr/>
+        </p:nvSpPr>
+        <p:spPr>
+          <a:xfrm>
+            <a:off x="4775200" y="2770909"/>
+            <a:ext cx="1173018" cy="369455"/>
+          </a:xfrm>
+          <a:prstGeom prst="rect">
+            <a:avLst/>
+          </a:prstGeom>
+          <a:noFill/>
+        </p:spPr>
+        <p:style>
+          <a:lnRef idx="2">
+            <a:schemeClr val="accent4"/>
+          </a:lnRef>
+          <a:fillRef idx="1">
+            <a:schemeClr val="lt1"/>
+          </a:fillRef>
+          <a:effectRef idx="0">
+            <a:schemeClr val="accent4"/>
+          </a:effectRef>
+          <a:fontRef idx="minor">
+            <a:schemeClr val="dk1"/>
+          </a:fontRef>
+        </p:style>
+        <p:txBody>
+          <a:bodyPr rtlCol="0" anchor="ctr"/>
+          <a:lstStyle/>
+          <a:p>
+            <a:pPr algn="ctr"/>
+            <a:endParaRPr kumimoji="1" lang="ja-JP" altLang="en-US">
+              <a:ln>
+                <a:solidFill>
+                  <a:sysClr val="windowText" lastClr="000000"/>
+                </a:solidFill>
+              </a:ln>
+              <a:noFill/>
+            </a:endParaRPr>
+          </a:p>
+        </p:txBody>
+      </p:sp>
+      <p:sp>
+        <p:nvSpPr>
+          <p:cNvPr id="4" name="Rectángulo 3">
+            <a:extLst>
+              <a:ext uri="{FF2B5EF4-FFF2-40B4-BE49-F238E27FC236}">
+                <a16:creationId xmlns:a16="http://schemas.microsoft.com/office/drawing/2014/main" id="{3C40F106-7BE2-5147-4887-8EDB64DE07FC}"/>
+              </a:ext>
+            </a:extLst>
+          </p:cNvPr>
+          <p:cNvSpPr/>
+          <p:nvPr/>
+        </p:nvSpPr>
+        <p:spPr>
+          <a:xfrm>
+            <a:off x="10307783" y="2770909"/>
+            <a:ext cx="1173018" cy="369455"/>
+          </a:xfrm>
+          <a:prstGeom prst="rect">
+            <a:avLst/>
+          </a:prstGeom>
+          <a:noFill/>
+        </p:spPr>
+        <p:style>
+          <a:lnRef idx="2">
+            <a:schemeClr val="accent4"/>
+          </a:lnRef>
+          <a:fillRef idx="1">
+            <a:schemeClr val="lt1"/>
+          </a:fillRef>
+          <a:effectRef idx="0">
+            <a:schemeClr val="accent4"/>
+          </a:effectRef>
+          <a:fontRef idx="minor">
+            <a:schemeClr val="dk1"/>
+          </a:fontRef>
+        </p:style>
+        <p:txBody>
+          <a:bodyPr rtlCol="0" anchor="ctr"/>
+          <a:lstStyle/>
+          <a:p>
+            <a:pPr algn="ctr"/>
+            <a:endParaRPr kumimoji="1" lang="ja-JP" altLang="en-US">
+              <a:ln>
+                <a:solidFill>
+                  <a:sysClr val="windowText" lastClr="000000"/>
+                </a:solidFill>
+              </a:ln>
+              <a:noFill/>
+            </a:endParaRPr>
           </a:p>
         </p:txBody>
       </p:sp>
